--- a/lecons/F1/13_F1_M3_L07_The_Atmosphere.pptx
+++ b/lecons/F1/13_F1_M3_L07_The_Atmosphere.pptx
@@ -729,7 +729,7 @@
           <a:p>
             <a:r>
               <a:rPr lang="en-US" dirty="0"/>
-              <a:t>Good. Salif wants to know the layers of the air around the Earth.</a:t>
+              <a:t>Good. Salif does not know what the air around the Earth is made of and whether it has layers.</a:t>
             </a:r>
             <a:endParaRPr lang="en-US" dirty="0"/>
           </a:p>
@@ -905,7 +905,7 @@
           <a:p>
             <a:r>
               <a:rPr lang="en-US" dirty="0"/>
-              <a:t>Good. Below the plane, in the lowest layer.</a:t>
+              <a:t>Good. Below the plane, in the lowest layer of the air.</a:t>
             </a:r>
             <a:endParaRPr lang="en-US" dirty="0"/>
           </a:p>
@@ -1169,7 +1169,7 @@
           <a:p>
             <a:r>
               <a:rPr lang="en-US" dirty="0"/>
-              <a:t>From this situation, the action we are working towards in this lesson is the following: protect the air: avoid burning plastics and use products without CFCs.</a:t>
+              <a:t>From this situation, the action we are working towards in this lesson is the following: protect the air: avoid burning plastics and tyres.</a:t>
             </a:r>
             <a:endParaRPr lang="en-US" dirty="0"/>
           </a:p>
@@ -1433,7 +1433,7 @@
           <a:p>
             <a:r>
               <a:rPr lang="en-US" dirty="0"/>
-              <a:t>Here is the question for Activity 1: What is the atmosphere? Take one minute to think and write your answer in your rough notebook.</a:t>
+              <a:t>Here is the question for Activity 1: What surrounds the Earth above the ground? Take one minute to think and write your answer in your rough notebook.</a:t>
             </a:r>
             <a:endParaRPr lang="en-US" dirty="0"/>
           </a:p>
@@ -1609,7 +1609,7 @@
           <a:p>
             <a:r>
               <a:rPr lang="en-US" dirty="0"/>
-              <a:t>Let us check the answer together. It is the layer of air that surrounds the Earth.</a:t>
+              <a:t>Let us check the answer together. A layer of air called the atmosphere.</a:t>
             </a:r>
             <a:endParaRPr lang="en-US" dirty="0"/>
           </a:p>
@@ -1785,7 +1785,7 @@
           <a:p>
             <a:r>
               <a:rPr lang="en-US" dirty="0"/>
-              <a:t>Here is the question for Activity 2: Which two gases form most of the air? Take one minute to think and write your answer in your rough notebook.</a:t>
+              <a:t>Here is the question for Activity 2: Which gas forms most of the air? Take one minute to think and write your answer in your rough notebook.</a:t>
             </a:r>
             <a:endParaRPr lang="en-US" dirty="0"/>
           </a:p>
@@ -1873,7 +1873,7 @@
           <a:p>
             <a:r>
               <a:rPr lang="en-US" dirty="0"/>
-              <a:t>Let us check the answer together. Nitrogen (about 78 %) and oxygen (about 21 %).</a:t>
+              <a:t>Let us check the answer together. Nitrogen, about 78 % of the air.</a:t>
             </a:r>
             <a:endParaRPr lang="en-US" dirty="0"/>
           </a:p>
@@ -1961,7 +1961,7 @@
           <a:p>
             <a:r>
               <a:rPr lang="en-US" dirty="0"/>
-              <a:t>Activity 3. Look carefully at this diagram: the layers of the atmosphere. Observe every detail before I ask the question.</a:t>
+              <a:t>Activity 3. Look carefully at this diagram: the gases of the air. Observe every detail before I ask the question.</a:t>
             </a:r>
             <a:endParaRPr lang="en-US" dirty="0"/>
           </a:p>
@@ -2049,7 +2049,7 @@
           <a:p>
             <a:r>
               <a:rPr lang="en-US" dirty="0"/>
-              <a:t>Here is the question for Activity 3: Name the four layers of the atmosphere from the ground upwards. Take one minute to think and write your answer in your rough notebook.</a:t>
+              <a:t>Here is the question for Activity 3: Which gas do we breathe to live? Take one minute to think and write your answer in your rough notebook.</a:t>
             </a:r>
             <a:endParaRPr lang="en-US" dirty="0"/>
           </a:p>
@@ -2137,7 +2137,7 @@
           <a:p>
             <a:r>
               <a:rPr lang="en-US" dirty="0"/>
-              <a:t>Let us check the answer together. Troposphere, stratosphere, mesosphere and thermosphere.</a:t>
+              <a:t>Let us check the answer together. Oxygen, about 21 % of the air.</a:t>
             </a:r>
             <a:endParaRPr lang="en-US" dirty="0"/>
           </a:p>
@@ -2313,7 +2313,7 @@
           <a:p>
             <a:r>
               <a:rPr lang="en-US" dirty="0"/>
-              <a:t>Here is the question for Activity 4: In which layer do clouds, rain and wind occur? Take one minute to think and write your answer in your rough notebook.</a:t>
+              <a:t>Here is the question for Activity 4: In which part of the atmosphere do clouds, rain and wind occur? Take one minute to think and write your answer in your rough notebook.</a:t>
             </a:r>
             <a:endParaRPr lang="en-US" dirty="0"/>
           </a:p>
@@ -2401,7 +2401,7 @@
           <a:p>
             <a:r>
               <a:rPr lang="en-US" dirty="0"/>
-              <a:t>Let us check the answer together. In the troposphere, the lowest layer.</a:t>
+              <a:t>Let us check the answer together. In the lowest layer, the troposphere.</a:t>
             </a:r>
             <a:endParaRPr lang="en-US" dirty="0"/>
           </a:p>
@@ -2489,7 +2489,7 @@
           <a:p>
             <a:r>
               <a:rPr lang="en-US" dirty="0"/>
-              <a:t>Our topic is Protection against the Wrath of Nature, and the sub-topic is Climatic Disturbances. The key notions we shall use today are: atmosphere, ozone layer, global warming, greenhouse effect. At the end, you should be able to do this: learners are able to describe the composition and layers of the atmosphere and explain why it must be protected.</a:t>
+              <a:t>Our topic is Protection against the Wrath of Nature, and the sub-topic is Climatic Disturbances. The key notions we shall use today are: the atmosphere, ozone layer, global warming, greenhouse effect. At the end, you should be able to do this: learners are able to describe the composition and layers of the atmosphere and explain why it must be protected.</a:t>
             </a:r>
             <a:endParaRPr lang="en-US" dirty="0"/>
           </a:p>
@@ -2929,7 +2929,7 @@
           <a:p>
             <a:r>
               <a:rPr lang="en-US" dirty="0"/>
-              <a:t>Let us copy Meaning of the Atmosphere. The atmosphere is defined as follows. On this slide we have Atmosphere. Write each point on a new line, with the key term first, and explain it in your own words when we revise.</a:t>
+              <a:t>Let us copy the definitions. The key terms of this lesson are defined as follows. On this slide we have Atmosphere and Ozone layer. Write each point on a new line, with the key term first, and explain it in your own words when we revise.</a:t>
             </a:r>
             <a:endParaRPr lang="en-US" dirty="0"/>
           </a:p>
@@ -3017,7 +3017,7 @@
           <a:p>
             <a:r>
               <a:rPr lang="en-US" dirty="0"/>
-              <a:t>Let us copy Composition of the Atmosphere. The atmosphere is made up of the following elements. On this slide we have Nitrogen and Oxygen. Write each point on a new line, with the key term first, and explain it in your own words when we revise. When you finish, we go to the next slide.</a:t>
+              <a:t>Let us copy Composition of the Atmosphere. The atmosphere is made up of the following elements. Copy the point on Nitrogen on the left, then draw the diagram on the right: the gases of the air. Give it a title and label it clearly.</a:t>
             </a:r>
             <a:endParaRPr lang="en-US" dirty="0"/>
           </a:p>
@@ -3105,7 +3105,7 @@
           <a:p>
             <a:r>
               <a:rPr lang="en-US" dirty="0"/>
-              <a:t>We continue with Composition of the Atmosphere. On this slide we have Other gases. Write each point on a new line, with the key term first, and explain it in your own words when we revise.</a:t>
+              <a:t>We continue with Composition of the Atmosphere. On this slide we have Oxygen, Carbon dioxide and Water vapour, dust and other gases. Write each point on a new line, with the key term first, and explain it in your own words when we revise.</a:t>
             </a:r>
             <a:endParaRPr lang="en-US" dirty="0"/>
           </a:p>
@@ -3193,7 +3193,7 @@
           <a:p>
             <a:r>
               <a:rPr lang="en-US" dirty="0"/>
-              <a:t>Now draw this illustration in your notebook: the gases of the air. Give it a title and label it clearly.</a:t>
+              <a:t>Let us copy Structure of the Atmosphere. The atmosphere has the following layers. Copy the point on Troposphere on the left, then draw the diagram on the right: the layers of the atmosphere. Give it a title and label it clearly.</a:t>
             </a:r>
             <a:endParaRPr lang="en-US" dirty="0"/>
           </a:p>
@@ -3281,7 +3281,7 @@
           <a:p>
             <a:r>
               <a:rPr lang="en-US" dirty="0"/>
-              <a:t>Let us copy Structure of the Atmosphere. The atmosphere has the following layers. On this slide we have Troposphere and Stratosphere. Write each point on a new line, with the key term first, and explain it in your own words when we revise. When you finish, we go to the next slide.</a:t>
+              <a:t>Copy the point on Stratosphere on the left, then draw the diagram on the right: the ozone layer seen from space. Give it a title and label it clearly.</a:t>
             </a:r>
             <a:endParaRPr lang="en-US" dirty="0"/>
           </a:p>
@@ -3369,7 +3369,7 @@
           <a:p>
             <a:r>
               <a:rPr lang="en-US" dirty="0"/>
-              <a:t>We continue with Structure of the Atmosphere. On this slide we have Mesosphere and Thermosphere. Write each point on a new line, with the key term first, and explain it in your own words when we revise.</a:t>
+              <a:t>We continue with Structure of the Atmosphere. On this slide we have Mesosphere. Write each point on a new line, with the key term first, and explain it in your own words when we revise.</a:t>
             </a:r>
             <a:endParaRPr lang="en-US" dirty="0"/>
           </a:p>
@@ -3545,7 +3545,7 @@
           <a:p>
             <a:r>
               <a:rPr lang="en-US" dirty="0"/>
-              <a:t>Now draw this illustration in your notebook: the layers of the atmosphere. Give it a title and label it clearly.</a:t>
+              <a:t>Copy the point on Thermosphere on the left, then draw the diagram on the right: an aurora. Give it a title and label it clearly.</a:t>
             </a:r>
             <a:endParaRPr lang="en-US" dirty="0"/>
           </a:p>
@@ -5041,7 +5041,7 @@
           <a:p>
             <a:r>
               <a:rPr lang="en-US" dirty="0"/>
-              <a:t>Listen carefully to this situation from real life. During a flight from Garoua to Douala, Salif looks through the window. The plane is above the clouds and the sky is very clear. The pilot says the plane flies at 10 km in the lowest layer of the air. Think about it, because I am going to ask you some questions.</a:t>
+              <a:t>Listen carefully to this situation from real life. During a flight from Garoua to Douala, Salif looks through the window. The plane is far above the clouds and the sky is very clear. Salif asks the flight attendant: "What is this air around the Earth made of, and are there layers in it?" Think about it, because I am going to ask you some questions.</a:t>
             </a:r>
             <a:endParaRPr lang="en-US" dirty="0"/>
           </a:p>
@@ -6724,7 +6724,7 @@
                 <a:ea typeface="Times New Roman" pitchFamily="34" charset="-122"/>
                 <a:cs typeface="Times New Roman" pitchFamily="34" charset="-120"/>
               </a:rPr>
-              <a:t>Salif wants to know the layers of the air around the Earth.</a:t>
+              <a:t>Salif does not know what the air around the Earth is made of and whether it has layers.</a:t>
             </a:r>
             <a:endParaRPr lang="en-US" sz="4000" dirty="0"/>
           </a:p>
@@ -7162,7 +7162,7 @@
                 <a:ea typeface="Times New Roman" pitchFamily="34" charset="-122"/>
                 <a:cs typeface="Times New Roman" pitchFamily="34" charset="-120"/>
               </a:rPr>
-              <a:t>Below the plane, in the lowest layer.</a:t>
+              <a:t>Below the plane, in the lowest layer of the air.</a:t>
             </a:r>
             <a:endParaRPr lang="en-US" sz="4000" dirty="0"/>
           </a:p>
@@ -7819,7 +7819,7 @@
                 <a:ea typeface="Times New Roman" pitchFamily="34" charset="-122"/>
                 <a:cs typeface="Times New Roman" pitchFamily="34" charset="-120"/>
               </a:rPr>
-              <a:t>Protect the air: avoid burning plastics and use products without CFCs.</a:t>
+              <a:t>Protect the air: avoid burning plastics and tyres.</a:t>
             </a:r>
             <a:endParaRPr lang="en-US" sz="4000" dirty="0"/>
           </a:p>
@@ -8471,7 +8471,7 @@
                 <a:ea typeface="Times New Roman" pitchFamily="34" charset="-122"/>
                 <a:cs typeface="Times New Roman" pitchFamily="34" charset="-120"/>
               </a:rPr>
-              <a:t>What is the atmosphere?</a:t>
+              <a:t>What surrounds the Earth above the ground?</a:t>
             </a:r>
             <a:endParaRPr lang="en-US" sz="4000" dirty="0"/>
           </a:p>
@@ -9285,7 +9285,7 @@
                 <a:ea typeface="Times New Roman" pitchFamily="34" charset="-122"/>
                 <a:cs typeface="Times New Roman" pitchFamily="34" charset="-120"/>
               </a:rPr>
-              <a:t>It is the layer of air that surrounds the Earth.</a:t>
+              <a:t>A layer of air called the atmosphere.</a:t>
             </a:r>
             <a:endParaRPr lang="en-US" sz="4000" dirty="0"/>
           </a:p>
@@ -9718,7 +9718,7 @@
                 <a:ea typeface="Times New Roman" pitchFamily="34" charset="-122"/>
                 <a:cs typeface="Times New Roman" pitchFamily="34" charset="-120"/>
               </a:rPr>
-              <a:t>Which two gases form most of the air?</a:t>
+              <a:t>Which gas forms most of the air?</a:t>
             </a:r>
             <a:endParaRPr lang="en-US" sz="4000" dirty="0"/>
           </a:p>
@@ -9937,7 +9937,7 @@
                 <a:ea typeface="Times New Roman" pitchFamily="34" charset="-122"/>
                 <a:cs typeface="Times New Roman" pitchFamily="34" charset="-120"/>
               </a:rPr>
-              <a:t>Nitrogen (about 78 %) and oxygen (about 21 %).</a:t>
+              <a:t>Nitrogen, about 78 % of the air.</a:t>
             </a:r>
             <a:endParaRPr lang="en-US" sz="4000" dirty="0"/>
           </a:p>
@@ -10049,7 +10049,7 @@
                 <a:ea typeface="Calibri" pitchFamily="34" charset="-122"/>
                 <a:cs typeface="Calibri" pitchFamily="34" charset="-120"/>
               </a:rPr>
-              <a:t>3. STRUCTURE</a:t>
+              <a:t>2. COMPOSITION</a:t>
             </a:r>
             <a:endParaRPr lang="en-US" sz="1400" dirty="0"/>
           </a:p>
@@ -10096,7 +10096,7 @@
       </p:sp>
       <p:pic>
         <p:nvPicPr>
-          <p:cNvPr id="4" name="Image 0" descr="/home/claude/f4/img/v2/atmosphere_big.png">    </p:cNvPr>
+          <p:cNvPr id="4" name="Image 0" descr="/home/claude/f4/img/v2/gases_pie_big.png">    </p:cNvPr>
           <p:cNvPicPr>
             <a:picLocks noChangeAspect="1"/>
           </p:cNvPicPr>
@@ -10151,7 +10151,7 @@
                 <a:ea typeface="Times New Roman" pitchFamily="34" charset="-122"/>
                 <a:cs typeface="Times New Roman" pitchFamily="34" charset="-120"/>
               </a:rPr>
-              <a:t>The layers of the atmosphere.</a:t>
+              <a:t>The gases of the air.</a:t>
             </a:r>
             <a:endParaRPr lang="en-US" sz="1800" dirty="0"/>
           </a:p>
@@ -10263,7 +10263,7 @@
                 <a:ea typeface="Calibri" pitchFamily="34" charset="-122"/>
                 <a:cs typeface="Calibri" pitchFamily="34" charset="-120"/>
               </a:rPr>
-              <a:t>3. STRUCTURE</a:t>
+              <a:t>2. COMPOSITION</a:t>
             </a:r>
             <a:endParaRPr lang="en-US" sz="1400" dirty="0"/>
           </a:p>
@@ -10370,7 +10370,7 @@
                 <a:ea typeface="Times New Roman" pitchFamily="34" charset="-122"/>
                 <a:cs typeface="Times New Roman" pitchFamily="34" charset="-120"/>
               </a:rPr>
-              <a:t>Name the four layers of the atmosphere from the ground upwards.</a:t>
+              <a:t>Which gas do we breathe to live?</a:t>
             </a:r>
             <a:endParaRPr lang="en-US" sz="4000" dirty="0"/>
           </a:p>
@@ -10482,7 +10482,7 @@
                 <a:ea typeface="Calibri" pitchFamily="34" charset="-122"/>
                 <a:cs typeface="Calibri" pitchFamily="34" charset="-120"/>
               </a:rPr>
-              <a:t>3. STRUCTURE</a:t>
+              <a:t>2. COMPOSITION</a:t>
             </a:r>
             <a:endParaRPr lang="en-US" sz="1400" dirty="0"/>
           </a:p>
@@ -10589,7 +10589,7 @@
                 <a:ea typeface="Times New Roman" pitchFamily="34" charset="-122"/>
                 <a:cs typeface="Times New Roman" pitchFamily="34" charset="-120"/>
               </a:rPr>
-              <a:t>Troposphere, stratosphere, mesosphere and thermosphere.</a:t>
+              <a:t>Oxygen, about 21 % of the air.</a:t>
             </a:r>
             <a:endParaRPr lang="en-US" sz="4000" dirty="0"/>
           </a:p>
@@ -11022,7 +11022,7 @@
                 <a:ea typeface="Times New Roman" pitchFamily="34" charset="-122"/>
                 <a:cs typeface="Times New Roman" pitchFamily="34" charset="-120"/>
               </a:rPr>
-              <a:t>In which layer do clouds, rain and wind occur?</a:t>
+              <a:t>In which part of the atmosphere do clouds, rain and wind occur?</a:t>
             </a:r>
             <a:endParaRPr lang="en-US" sz="4000" dirty="0"/>
           </a:p>
@@ -11241,7 +11241,7 @@
                 <a:ea typeface="Times New Roman" pitchFamily="34" charset="-122"/>
                 <a:cs typeface="Times New Roman" pitchFamily="34" charset="-120"/>
               </a:rPr>
-              <a:t>In the troposphere, the lowest layer.</a:t>
+              <a:t>In the lowest layer, the troposphere.</a:t>
             </a:r>
             <a:endParaRPr lang="en-US" sz="4000" dirty="0"/>
           </a:p>
@@ -11924,7 +11924,7 @@
                           <a:ea typeface="Calibri" pitchFamily="34" charset="-122"/>
                           <a:cs typeface="Calibri" pitchFamily="34" charset="-120"/>
                         </a:rPr>
-                        <a:t>Atmosphere, ozone layer, global warming, greenhouse effect.</a:t>
+                        <a:t>The atmosphere, ozone layer, global warming, greenhouse effect.</a:t>
                       </a:r>
                       <a:endParaRPr lang="en-US" sz="1700" dirty="0">
                         <a:latin typeface="Calibri" charset="0"/>
@@ -12062,7 +12062,7 @@
                           <a:ea typeface="Calibri" pitchFamily="34" charset="-122"/>
                           <a:cs typeface="Calibri" pitchFamily="34" charset="-120"/>
                         </a:rPr>
-                        <a:t>Definition, composition and structure of the atmosphere.</a:t>
+                        <a:t>Definition; composition; structure.</a:t>
                       </a:r>
                       <a:endParaRPr lang="en-US" sz="1700" dirty="0">
                         <a:latin typeface="Calibri" charset="0"/>
@@ -12362,7 +12362,7 @@
                 <a:ea typeface="Calibri" pitchFamily="34" charset="-122"/>
                 <a:cs typeface="Calibri" pitchFamily="34" charset="-120"/>
               </a:rPr>
-              <a:t>3. THE OZONE LAYER</a:t>
+              <a:t>3. STRUCTURE</a:t>
             </a:r>
             <a:endParaRPr lang="en-US" sz="1400" dirty="0"/>
           </a:p>
@@ -12576,7 +12576,7 @@
                 <a:ea typeface="Calibri" pitchFamily="34" charset="-122"/>
                 <a:cs typeface="Calibri" pitchFamily="34" charset="-120"/>
               </a:rPr>
-              <a:t>3. THE OZONE LAYER</a:t>
+              <a:t>3. STRUCTURE</a:t>
             </a:r>
             <a:endParaRPr lang="en-US" sz="1400" dirty="0"/>
           </a:p>
@@ -12795,7 +12795,7 @@
                 <a:ea typeface="Calibri" pitchFamily="34" charset="-122"/>
                 <a:cs typeface="Calibri" pitchFamily="34" charset="-120"/>
               </a:rPr>
-              <a:t>3. THE OZONE LAYER</a:t>
+              <a:t>3. STRUCTURE</a:t>
             </a:r>
             <a:endParaRPr lang="en-US" sz="1400" dirty="0"/>
           </a:p>
@@ -13296,7 +13296,7 @@
         <p:spPr>
           <a:xfrm>
             <a:off x="0" y="658368"/>
-            <a:ext cx="5120640" cy="5833872"/>
+            <a:ext cx="2468880" cy="5833872"/>
           </a:xfrm>
           <a:prstGeom prst="rect">
             <a:avLst/>
@@ -13311,8 +13311,8 @@
         </p:nvSpPr>
         <p:spPr>
           <a:xfrm>
-            <a:off x="5349240" y="1005840"/>
-            <a:ext cx="6522415" cy="731520"/>
+            <a:off x="2697480" y="1005840"/>
+            <a:ext cx="9174175" cy="731520"/>
           </a:xfrm>
           <a:prstGeom prst="rect">
             <a:avLst/>
@@ -13338,7 +13338,7 @@
                 <a:ea typeface="Times New Roman" pitchFamily="34" charset="-122"/>
                 <a:cs typeface="Times New Roman" pitchFamily="34" charset="-120"/>
               </a:rPr>
-              <a:t>1. Meaning of the Atmosphere</a:t>
+              <a:t>DEFINITIONS</a:t>
             </a:r>
             <a:endParaRPr lang="en-US" sz="3600" dirty="0"/>
           </a:p>
@@ -13352,8 +13352,8 @@
         </p:nvSpPr>
         <p:spPr>
           <a:xfrm>
-            <a:off x="5349240" y="1783080"/>
-            <a:ext cx="6522415" cy="4663440"/>
+            <a:off x="2697480" y="1783080"/>
+            <a:ext cx="9174175" cy="4663440"/>
           </a:xfrm>
           <a:prstGeom prst="rect">
             <a:avLst/>
@@ -13380,7 +13380,7 @@
                 <a:ea typeface="Times New Roman" pitchFamily="34" charset="-122"/>
                 <a:cs typeface="Times New Roman" pitchFamily="34" charset="-120"/>
               </a:rPr>
-              <a:t>The atmosphere is defined as follows:</a:t>
+              <a:t>The key terms of this lesson are defined as follows:</a:t>
             </a:r>
             <a:endParaRPr lang="en-US" sz="4000" dirty="0"/>
           </a:p>
@@ -13418,6 +13418,43 @@
                 <a:cs typeface="Times New Roman" pitchFamily="34" charset="-120"/>
               </a:rPr>
               <a:t>It is the layer of air that surrounds the Earth and protects life.</a:t>
+            </a:r>
+            <a:endParaRPr lang="en-US" sz="4000" dirty="0"/>
+          </a:p>
+          <a:p>
+            <a:pPr algn="l" indent="0" marL="0">
+              <a:spcAft>
+                <a:spcPts val="800"/>
+              </a:spcAft>
+              <a:buNone/>
+            </a:pPr>
+            <a:r>
+              <a:rPr lang="en-US" sz="4000" b="1" dirty="0">
+                <a:solidFill>
+                  <a:srgbClr val="111111"/>
+                </a:solidFill>
+                <a:latin typeface="Times New Roman" pitchFamily="34" charset="0"/>
+                <a:ea typeface="Times New Roman" pitchFamily="34" charset="-122"/>
+                <a:cs typeface="Times New Roman" pitchFamily="34" charset="-120"/>
+              </a:rPr>
+              <a:t>Ozone layer: </a:t>
+            </a:r>
+            <a:pPr algn="l" indent="0" marL="0">
+              <a:spcAft>
+                <a:spcPts val="800"/>
+              </a:spcAft>
+              <a:buNone/>
+            </a:pPr>
+            <a:r>
+              <a:rPr lang="en-US" sz="4000" dirty="0">
+                <a:solidFill>
+                  <a:srgbClr val="111111"/>
+                </a:solidFill>
+                <a:latin typeface="Times New Roman" pitchFamily="34" charset="0"/>
+                <a:ea typeface="Times New Roman" pitchFamily="34" charset="-122"/>
+                <a:cs typeface="Times New Roman" pitchFamily="34" charset="-120"/>
+              </a:rPr>
+              <a:t>It is a layer of ozone gas in the atmosphere that stops harmful rays of the Sun.</a:t>
             </a:r>
             <a:endParaRPr lang="en-US" sz="4000" dirty="0"/>
           </a:p>
@@ -13535,9 +13572,129 @@
           </a:p>
         </p:txBody>
       </p:sp>
+      <p:sp>
+        <p:nvSpPr>
+          <p:cNvPr id="3" name="Text 1"/>
+          <p:cNvSpPr/>
+          <p:nvPr/>
+        </p:nvSpPr>
+        <p:spPr>
+          <a:xfrm>
+            <a:off x="365760" y="1005840"/>
+            <a:ext cx="11460175" cy="731520"/>
+          </a:xfrm>
+          <a:prstGeom prst="rect">
+            <a:avLst/>
+          </a:prstGeom>
+          <a:noFill/>
+          <a:ln/>
+        </p:spPr>
+        <p:txBody>
+          <a:bodyPr wrap="square" lIns="0" tIns="0" rIns="0" bIns="0" rtlCol="0" anchor="ctr">
+            <a:normAutofit/>
+          </a:bodyPr>
+          <a:lstStyle/>
+          <a:p>
+            <a:pPr algn="ctr" indent="0" marL="0">
+              <a:buNone/>
+            </a:pPr>
+            <a:r>
+              <a:rPr lang="en-US" sz="3600" b="1" dirty="0">
+                <a:solidFill>
+                  <a:srgbClr val="990011"/>
+                </a:solidFill>
+                <a:latin typeface="Times New Roman" pitchFamily="34" charset="0"/>
+                <a:ea typeface="Times New Roman" pitchFamily="34" charset="-122"/>
+                <a:cs typeface="Times New Roman" pitchFamily="34" charset="-120"/>
+              </a:rPr>
+              <a:t>1. Composition of the Atmosphere</a:t>
+            </a:r>
+            <a:endParaRPr lang="en-US" sz="3600" dirty="0"/>
+          </a:p>
+        </p:txBody>
+      </p:sp>
+      <p:sp>
+        <p:nvSpPr>
+          <p:cNvPr id="4" name="Text 2"/>
+          <p:cNvSpPr/>
+          <p:nvPr/>
+        </p:nvSpPr>
+        <p:spPr>
+          <a:xfrm>
+            <a:off x="365760" y="1783080"/>
+            <a:ext cx="4846320" cy="4617720"/>
+          </a:xfrm>
+          <a:prstGeom prst="rect">
+            <a:avLst/>
+          </a:prstGeom>
+          <a:noFill/>
+          <a:ln/>
+        </p:spPr>
+        <p:txBody>
+          <a:bodyPr wrap="square" lIns="0" tIns="0" rIns="0" bIns="0" rtlCol="0" anchor="t"/>
+          <a:lstStyle/>
+          <a:p>
+            <a:pPr algn="l" indent="0" marL="0">
+              <a:spcAft>
+                <a:spcPts val="800"/>
+              </a:spcAft>
+              <a:buNone/>
+            </a:pPr>
+            <a:r>
+              <a:rPr lang="en-US" sz="3600" i="1" dirty="0">
+                <a:solidFill>
+                  <a:srgbClr val="111111"/>
+                </a:solidFill>
+                <a:latin typeface="Times New Roman" pitchFamily="34" charset="0"/>
+                <a:ea typeface="Times New Roman" pitchFamily="34" charset="-122"/>
+                <a:cs typeface="Times New Roman" pitchFamily="34" charset="-120"/>
+              </a:rPr>
+              <a:t>The atmosphere is made up of the following elements:</a:t>
+            </a:r>
+            <a:endParaRPr lang="en-US" sz="3600" dirty="0"/>
+          </a:p>
+          <a:p>
+            <a:pPr algn="l" indent="0" marL="0">
+              <a:spcAft>
+                <a:spcPts val="800"/>
+              </a:spcAft>
+              <a:buNone/>
+            </a:pPr>
+            <a:r>
+              <a:rPr lang="en-US" sz="3600" b="1" dirty="0">
+                <a:solidFill>
+                  <a:srgbClr val="111111"/>
+                </a:solidFill>
+                <a:latin typeface="Times New Roman" pitchFamily="34" charset="0"/>
+                <a:ea typeface="Times New Roman" pitchFamily="34" charset="-122"/>
+                <a:cs typeface="Times New Roman" pitchFamily="34" charset="-120"/>
+              </a:rPr>
+              <a:t>Nitrogen: </a:t>
+            </a:r>
+            <a:pPr algn="l" indent="0" marL="0">
+              <a:spcAft>
+                <a:spcPts val="800"/>
+              </a:spcAft>
+              <a:buNone/>
+            </a:pPr>
+            <a:r>
+              <a:rPr lang="en-US" sz="3600" dirty="0">
+                <a:solidFill>
+                  <a:srgbClr val="111111"/>
+                </a:solidFill>
+                <a:latin typeface="Times New Roman" pitchFamily="34" charset="0"/>
+                <a:ea typeface="Times New Roman" pitchFamily="34" charset="-122"/>
+                <a:cs typeface="Times New Roman" pitchFamily="34" charset="-120"/>
+              </a:rPr>
+              <a:t>It forms about 78 % of the air.</a:t>
+            </a:r>
+            <a:endParaRPr lang="en-US" sz="3600" dirty="0"/>
+          </a:p>
+        </p:txBody>
+      </p:sp>
       <p:pic>
         <p:nvPicPr>
-          <p:cNvPr id="3" name="Image 0" descr="/home/claude/f4/img/minesec_sheet.png">    </p:cNvPr>
+          <p:cNvPr id="5" name="Image 0" descr="/home/claude/f4/img/v2/gases_pie_big.png">    </p:cNvPr>
           <p:cNvPicPr>
             <a:picLocks noChangeAspect="1"/>
           </p:cNvPicPr>
@@ -13551,8 +13708,8 @@
         </p:blipFill>
         <p:spPr>
           <a:xfrm>
-            <a:off x="0" y="658368"/>
-            <a:ext cx="5120640" cy="5833872"/>
+            <a:off x="5349240" y="2617506"/>
+            <a:ext cx="6659575" cy="2601397"/>
           </a:xfrm>
           <a:prstGeom prst="rect">
             <a:avLst/>
@@ -13561,14 +13718,14 @@
       </p:pic>
       <p:sp>
         <p:nvSpPr>
-          <p:cNvPr id="4" name="Text 1"/>
+          <p:cNvPr id="6" name="Text 3"/>
           <p:cNvSpPr/>
           <p:nvPr/>
         </p:nvSpPr>
         <p:spPr>
           <a:xfrm>
-            <a:off x="5349240" y="1005840"/>
-            <a:ext cx="6522415" cy="731520"/>
+            <a:off x="5349240" y="6089904"/>
+            <a:ext cx="6659575" cy="347472"/>
           </a:xfrm>
           <a:prstGeom prst="rect">
             <a:avLst/>
@@ -13577,142 +13734,24 @@
           <a:ln/>
         </p:spPr>
         <p:txBody>
-          <a:bodyPr wrap="square" lIns="0" tIns="0" rIns="0" bIns="0" rtlCol="0" anchor="ctr">
-            <a:normAutofit/>
-          </a:bodyPr>
+          <a:bodyPr wrap="square" lIns="0" tIns="0" rIns="0" bIns="0" rtlCol="0" anchor="ctr"/>
           <a:lstStyle/>
           <a:p>
             <a:pPr algn="ctr" indent="0" marL="0">
               <a:buNone/>
             </a:pPr>
             <a:r>
-              <a:rPr lang="en-US" sz="3600" b="1" dirty="0">
-                <a:solidFill>
-                  <a:srgbClr val="990011"/>
+              <a:rPr lang="en-US" sz="1600" i="1" dirty="0">
+                <a:solidFill>
+                  <a:srgbClr val="555555"/>
                 </a:solidFill>
                 <a:latin typeface="Times New Roman" pitchFamily="34" charset="0"/>
                 <a:ea typeface="Times New Roman" pitchFamily="34" charset="-122"/>
                 <a:cs typeface="Times New Roman" pitchFamily="34" charset="-120"/>
               </a:rPr>
-              <a:t>2. Composition of the Atmosphere</a:t>
-            </a:r>
-            <a:endParaRPr lang="en-US" sz="3600" dirty="0"/>
-          </a:p>
-        </p:txBody>
-      </p:sp>
-      <p:sp>
-        <p:nvSpPr>
-          <p:cNvPr id="5" name="Text 2"/>
-          <p:cNvSpPr/>
-          <p:nvPr/>
-        </p:nvSpPr>
-        <p:spPr>
-          <a:xfrm>
-            <a:off x="5349240" y="1783080"/>
-            <a:ext cx="6522415" cy="4663440"/>
-          </a:xfrm>
-          <a:prstGeom prst="rect">
-            <a:avLst/>
-          </a:prstGeom>
-          <a:noFill/>
-          <a:ln/>
-        </p:spPr>
-        <p:txBody>
-          <a:bodyPr wrap="square" lIns="0" tIns="0" rIns="0" bIns="0" rtlCol="0" anchor="t"/>
-          <a:lstStyle/>
-          <a:p>
-            <a:pPr algn="l" indent="0" marL="0">
-              <a:spcAft>
-                <a:spcPts val="800"/>
-              </a:spcAft>
-              <a:buNone/>
-            </a:pPr>
-            <a:r>
-              <a:rPr lang="en-US" sz="4000" i="1" dirty="0">
-                <a:solidFill>
-                  <a:srgbClr val="111111"/>
-                </a:solidFill>
-                <a:latin typeface="Times New Roman" pitchFamily="34" charset="0"/>
-                <a:ea typeface="Times New Roman" pitchFamily="34" charset="-122"/>
-                <a:cs typeface="Times New Roman" pitchFamily="34" charset="-120"/>
-              </a:rPr>
-              <a:t>The atmosphere is made up of the following elements:</a:t>
-            </a:r>
-            <a:endParaRPr lang="en-US" sz="4000" dirty="0"/>
-          </a:p>
-          <a:p>
-            <a:pPr algn="l" indent="0" marL="0">
-              <a:spcAft>
-                <a:spcPts val="800"/>
-              </a:spcAft>
-              <a:buNone/>
-            </a:pPr>
-            <a:r>
-              <a:rPr lang="en-US" sz="4000" b="1" dirty="0">
-                <a:solidFill>
-                  <a:srgbClr val="111111"/>
-                </a:solidFill>
-                <a:latin typeface="Times New Roman" pitchFamily="34" charset="0"/>
-                <a:ea typeface="Times New Roman" pitchFamily="34" charset="-122"/>
-                <a:cs typeface="Times New Roman" pitchFamily="34" charset="-120"/>
-              </a:rPr>
-              <a:t>Nitrogen: </a:t>
-            </a:r>
-            <a:pPr algn="l" indent="0" marL="0">
-              <a:spcAft>
-                <a:spcPts val="800"/>
-              </a:spcAft>
-              <a:buNone/>
-            </a:pPr>
-            <a:r>
-              <a:rPr lang="en-US" sz="4000" dirty="0">
-                <a:solidFill>
-                  <a:srgbClr val="111111"/>
-                </a:solidFill>
-                <a:latin typeface="Times New Roman" pitchFamily="34" charset="0"/>
-                <a:ea typeface="Times New Roman" pitchFamily="34" charset="-122"/>
-                <a:cs typeface="Times New Roman" pitchFamily="34" charset="-120"/>
-              </a:rPr>
-              <a:t>It forms about 78 % of the air.</a:t>
-            </a:r>
-            <a:endParaRPr lang="en-US" sz="4000" dirty="0"/>
-          </a:p>
-          <a:p>
-            <a:pPr algn="l" indent="0" marL="0">
-              <a:spcAft>
-                <a:spcPts val="800"/>
-              </a:spcAft>
-              <a:buNone/>
-            </a:pPr>
-            <a:r>
-              <a:rPr lang="en-US" sz="4000" b="1" dirty="0">
-                <a:solidFill>
-                  <a:srgbClr val="111111"/>
-                </a:solidFill>
-                <a:latin typeface="Times New Roman" pitchFamily="34" charset="0"/>
-                <a:ea typeface="Times New Roman" pitchFamily="34" charset="-122"/>
-                <a:cs typeface="Times New Roman" pitchFamily="34" charset="-120"/>
-              </a:rPr>
-              <a:t>Oxygen: </a:t>
-            </a:r>
-            <a:pPr algn="l" indent="0" marL="0">
-              <a:spcAft>
-                <a:spcPts val="800"/>
-              </a:spcAft>
-              <a:buNone/>
-            </a:pPr>
-            <a:r>
-              <a:rPr lang="en-US" sz="4000" dirty="0">
-                <a:solidFill>
-                  <a:srgbClr val="111111"/>
-                </a:solidFill>
-                <a:latin typeface="Times New Roman" pitchFamily="34" charset="0"/>
-                <a:ea typeface="Times New Roman" pitchFamily="34" charset="-122"/>
-                <a:cs typeface="Times New Roman" pitchFamily="34" charset="-120"/>
-              </a:rPr>
-              <a:t>It forms about 21 % of the air and people and animals breathe it.</a:t>
-            </a:r>
-            <a:endParaRPr lang="en-US" sz="4000" dirty="0"/>
+              <a:t>Illustration: the gases of the air</a:t>
+            </a:r>
+            <a:endParaRPr lang="en-US" sz="1600" dirty="0"/>
           </a:p>
         </p:txBody>
       </p:sp>
@@ -13845,7 +13884,7 @@
         <p:spPr>
           <a:xfrm>
             <a:off x="0" y="658368"/>
-            <a:ext cx="5120640" cy="5833872"/>
+            <a:ext cx="1463040" cy="5833872"/>
           </a:xfrm>
           <a:prstGeom prst="rect">
             <a:avLst/>
@@ -13860,8 +13899,8 @@
         </p:nvSpPr>
         <p:spPr>
           <a:xfrm>
-            <a:off x="5349240" y="1005840"/>
-            <a:ext cx="6522415" cy="731520"/>
+            <a:off x="1691640" y="1005840"/>
+            <a:ext cx="10180015" cy="731520"/>
           </a:xfrm>
           <a:prstGeom prst="rect">
             <a:avLst/>
@@ -13887,7 +13926,7 @@
                 <a:ea typeface="Times New Roman" pitchFamily="34" charset="-122"/>
                 <a:cs typeface="Times New Roman" pitchFamily="34" charset="-120"/>
               </a:rPr>
-              <a:t>2. Composition of the Atmosphere (continued)</a:t>
+              <a:t>1. Composition of the Atmosphere</a:t>
             </a:r>
             <a:endParaRPr lang="en-US" sz="3600" dirty="0"/>
           </a:p>
@@ -13901,8 +13940,8 @@
         </p:nvSpPr>
         <p:spPr>
           <a:xfrm>
-            <a:off x="5349240" y="1783080"/>
-            <a:ext cx="6522415" cy="4663440"/>
+            <a:off x="1691640" y="1783080"/>
+            <a:ext cx="10180015" cy="4663440"/>
           </a:xfrm>
           <a:prstGeom prst="rect">
             <a:avLst/>
@@ -13929,7 +13968,7 @@
                 <a:ea typeface="Times New Roman" pitchFamily="34" charset="-122"/>
                 <a:cs typeface="Times New Roman" pitchFamily="34" charset="-120"/>
               </a:rPr>
-              <a:t>Other gases: </a:t>
+              <a:t>Oxygen: </a:t>
             </a:r>
             <a:pPr algn="l" indent="0" marL="0">
               <a:spcAft>
@@ -13946,7 +13985,81 @@
                 <a:ea typeface="Times New Roman" pitchFamily="34" charset="-122"/>
                 <a:cs typeface="Times New Roman" pitchFamily="34" charset="-120"/>
               </a:rPr>
-              <a:t>Carbon dioxide, water vapour and ozone form about 1 % of the air.</a:t>
+              <a:t>It forms about 21 % of the air. People and animals breathe it.</a:t>
+            </a:r>
+            <a:endParaRPr lang="en-US" sz="4000" dirty="0"/>
+          </a:p>
+          <a:p>
+            <a:pPr algn="l" indent="0" marL="0">
+              <a:spcAft>
+                <a:spcPts val="800"/>
+              </a:spcAft>
+              <a:buNone/>
+            </a:pPr>
+            <a:r>
+              <a:rPr lang="en-US" sz="4000" b="1" dirty="0">
+                <a:solidFill>
+                  <a:srgbClr val="111111"/>
+                </a:solidFill>
+                <a:latin typeface="Times New Roman" pitchFamily="34" charset="0"/>
+                <a:ea typeface="Times New Roman" pitchFamily="34" charset="-122"/>
+                <a:cs typeface="Times New Roman" pitchFamily="34" charset="-120"/>
+              </a:rPr>
+              <a:t>Carbon dioxide: </a:t>
+            </a:r>
+            <a:pPr algn="l" indent="0" marL="0">
+              <a:spcAft>
+                <a:spcPts val="800"/>
+              </a:spcAft>
+              <a:buNone/>
+            </a:pPr>
+            <a:r>
+              <a:rPr lang="en-US" sz="4000" dirty="0">
+                <a:solidFill>
+                  <a:srgbClr val="111111"/>
+                </a:solidFill>
+                <a:latin typeface="Times New Roman" pitchFamily="34" charset="0"/>
+                <a:ea typeface="Times New Roman" pitchFamily="34" charset="-122"/>
+                <a:cs typeface="Times New Roman" pitchFamily="34" charset="-120"/>
+              </a:rPr>
+              <a:t>It forms a very small part of the air. Plants use it to make food.</a:t>
+            </a:r>
+            <a:endParaRPr lang="en-US" sz="4000" dirty="0"/>
+          </a:p>
+          <a:p>
+            <a:pPr algn="l" indent="0" marL="0">
+              <a:spcAft>
+                <a:spcPts val="800"/>
+              </a:spcAft>
+              <a:buNone/>
+            </a:pPr>
+            <a:r>
+              <a:rPr lang="en-US" sz="4000" b="1" dirty="0">
+                <a:solidFill>
+                  <a:srgbClr val="111111"/>
+                </a:solidFill>
+                <a:latin typeface="Times New Roman" pitchFamily="34" charset="0"/>
+                <a:ea typeface="Times New Roman" pitchFamily="34" charset="-122"/>
+                <a:cs typeface="Times New Roman" pitchFamily="34" charset="-120"/>
+              </a:rPr>
+              <a:t>Water vapour, dust and other gases: </a:t>
+            </a:r>
+            <a:pPr algn="l" indent="0" marL="0">
+              <a:spcAft>
+                <a:spcPts val="800"/>
+              </a:spcAft>
+              <a:buNone/>
+            </a:pPr>
+            <a:r>
+              <a:rPr lang="en-US" sz="4000" dirty="0">
+                <a:solidFill>
+                  <a:srgbClr val="111111"/>
+                </a:solidFill>
+                <a:latin typeface="Times New Roman" pitchFamily="34" charset="0"/>
+                <a:ea typeface="Times New Roman" pitchFamily="34" charset="-122"/>
+                <a:cs typeface="Times New Roman" pitchFamily="34" charset="-120"/>
+              </a:rPr>
+              <a:t>They form the rest of the air and help to form clouds.</a:t>
             </a:r>
             <a:endParaRPr lang="en-US" sz="4000" dirty="0"/>
           </a:p>
@@ -14072,8 +14185,8 @@
         </p:nvSpPr>
         <p:spPr>
           <a:xfrm>
-            <a:off x="457200" y="1005840"/>
-            <a:ext cx="11277295" cy="731520"/>
+            <a:off x="365760" y="1005840"/>
+            <a:ext cx="11460175" cy="731520"/>
           </a:xfrm>
           <a:prstGeom prst="rect">
             <a:avLst/>
@@ -14082,7 +14195,9 @@
           <a:ln/>
         </p:spPr>
         <p:txBody>
-          <a:bodyPr wrap="square" lIns="0" tIns="0" rIns="0" bIns="0" rtlCol="0" anchor="ctr"/>
+          <a:bodyPr wrap="square" lIns="0" tIns="0" rIns="0" bIns="0" rtlCol="0" anchor="ctr">
+            <a:normAutofit/>
+          </a:bodyPr>
           <a:lstStyle/>
           <a:p>
             <a:pPr algn="ctr" indent="0" marL="0">
@@ -14097,7 +14212,86 @@
                 <a:ea typeface="Times New Roman" pitchFamily="34" charset="-122"/>
                 <a:cs typeface="Times New Roman" pitchFamily="34" charset="-120"/>
               </a:rPr>
-              <a:t>2. Composition of the Atmosphere</a:t>
+              <a:t>2. Structure of the Atmosphere</a:t>
+            </a:r>
+            <a:endParaRPr lang="en-US" sz="3600" dirty="0"/>
+          </a:p>
+        </p:txBody>
+      </p:sp>
+      <p:sp>
+        <p:nvSpPr>
+          <p:cNvPr id="4" name="Text 2"/>
+          <p:cNvSpPr/>
+          <p:nvPr/>
+        </p:nvSpPr>
+        <p:spPr>
+          <a:xfrm>
+            <a:off x="365760" y="1783080"/>
+            <a:ext cx="4846320" cy="4617720"/>
+          </a:xfrm>
+          <a:prstGeom prst="rect">
+            <a:avLst/>
+          </a:prstGeom>
+          <a:noFill/>
+          <a:ln/>
+        </p:spPr>
+        <p:txBody>
+          <a:bodyPr wrap="square" lIns="0" tIns="0" rIns="0" bIns="0" rtlCol="0" anchor="t"/>
+          <a:lstStyle/>
+          <a:p>
+            <a:pPr algn="l" indent="0" marL="0">
+              <a:spcAft>
+                <a:spcPts val="800"/>
+              </a:spcAft>
+              <a:buNone/>
+            </a:pPr>
+            <a:r>
+              <a:rPr lang="en-US" sz="3600" i="1" dirty="0">
+                <a:solidFill>
+                  <a:srgbClr val="111111"/>
+                </a:solidFill>
+                <a:latin typeface="Times New Roman" pitchFamily="34" charset="0"/>
+                <a:ea typeface="Times New Roman" pitchFamily="34" charset="-122"/>
+                <a:cs typeface="Times New Roman" pitchFamily="34" charset="-120"/>
+              </a:rPr>
+              <a:t>The atmosphere has the following layers:</a:t>
+            </a:r>
+            <a:endParaRPr lang="en-US" sz="3600" dirty="0"/>
+          </a:p>
+          <a:p>
+            <a:pPr algn="l" indent="0" marL="0">
+              <a:spcAft>
+                <a:spcPts val="800"/>
+              </a:spcAft>
+              <a:buNone/>
+            </a:pPr>
+            <a:r>
+              <a:rPr lang="en-US" sz="3600" b="1" dirty="0">
+                <a:solidFill>
+                  <a:srgbClr val="111111"/>
+                </a:solidFill>
+                <a:latin typeface="Times New Roman" pitchFamily="34" charset="0"/>
+                <a:ea typeface="Times New Roman" pitchFamily="34" charset="-122"/>
+                <a:cs typeface="Times New Roman" pitchFamily="34" charset="-120"/>
+              </a:rPr>
+              <a:t>Troposphere: </a:t>
+            </a:r>
+            <a:pPr algn="l" indent="0" marL="0">
+              <a:spcAft>
+                <a:spcPts val="800"/>
+              </a:spcAft>
+              <a:buNone/>
+            </a:pPr>
+            <a:r>
+              <a:rPr lang="en-US" sz="3600" dirty="0">
+                <a:solidFill>
+                  <a:srgbClr val="111111"/>
+                </a:solidFill>
+                <a:latin typeface="Times New Roman" pitchFamily="34" charset="0"/>
+                <a:ea typeface="Times New Roman" pitchFamily="34" charset="-122"/>
+                <a:cs typeface="Times New Roman" pitchFamily="34" charset="-120"/>
+              </a:rPr>
+              <a:t>It is the lowest layer, up to about 12 km. Weather occurs in it.</a:t>
             </a:r>
             <a:endParaRPr lang="en-US" sz="3600" dirty="0"/>
           </a:p>
@@ -14105,7 +14299,7 @@
       </p:sp>
       <p:pic>
         <p:nvPicPr>
-          <p:cNvPr id="4" name="Image 0" descr="/home/claude/f4/img/v2/gases_pie_big.png">    </p:cNvPr>
+          <p:cNvPr id="5" name="Image 0" descr="/home/claude/f4/img/v2/atmosphere_big.png">    </p:cNvPr>
           <p:cNvPicPr>
             <a:picLocks noChangeAspect="1"/>
           </p:cNvPicPr>
@@ -14119,8 +14313,8 @@
         </p:blipFill>
         <p:spPr>
           <a:xfrm>
-            <a:off x="629930" y="1783080"/>
-            <a:ext cx="10931835" cy="4270248"/>
+            <a:off x="5349240" y="2617506"/>
+            <a:ext cx="6659575" cy="2601397"/>
           </a:xfrm>
           <a:prstGeom prst="rect">
             <a:avLst/>
@@ -14129,14 +14323,14 @@
       </p:pic>
       <p:sp>
         <p:nvSpPr>
-          <p:cNvPr id="5" name="Text 2"/>
+          <p:cNvPr id="6" name="Text 3"/>
           <p:cNvSpPr/>
           <p:nvPr/>
         </p:nvSpPr>
         <p:spPr>
           <a:xfrm>
-            <a:off x="457200" y="6089904"/>
-            <a:ext cx="11277295" cy="347472"/>
+            <a:off x="5349240" y="6089904"/>
+            <a:ext cx="6659575" cy="347472"/>
           </a:xfrm>
           <a:prstGeom prst="rect">
             <a:avLst/>
@@ -14152,7 +14346,7 @@
               <a:buNone/>
             </a:pPr>
             <a:r>
-              <a:rPr lang="en-US" sz="1800" i="1" dirty="0">
+              <a:rPr lang="en-US" sz="1600" i="1" dirty="0">
                 <a:solidFill>
                   <a:srgbClr val="555555"/>
                 </a:solidFill>
@@ -14160,9 +14354,9 @@
                 <a:ea typeface="Times New Roman" pitchFamily="34" charset="-122"/>
                 <a:cs typeface="Times New Roman" pitchFamily="34" charset="-120"/>
               </a:rPr>
-              <a:t>Illustration: the gases of the air</a:t>
-            </a:r>
-            <a:endParaRPr lang="en-US" sz="1800" dirty="0"/>
+              <a:t>Illustration: the layers of the atmosphere</a:t>
+            </a:r>
+            <a:endParaRPr lang="en-US" sz="1600" dirty="0"/>
           </a:p>
         </p:txBody>
       </p:sp>
@@ -14278,9 +14472,109 @@
           </a:p>
         </p:txBody>
       </p:sp>
+      <p:sp>
+        <p:nvSpPr>
+          <p:cNvPr id="3" name="Text 1"/>
+          <p:cNvSpPr/>
+          <p:nvPr/>
+        </p:nvSpPr>
+        <p:spPr>
+          <a:xfrm>
+            <a:off x="365760" y="1005840"/>
+            <a:ext cx="11460175" cy="731520"/>
+          </a:xfrm>
+          <a:prstGeom prst="rect">
+            <a:avLst/>
+          </a:prstGeom>
+          <a:noFill/>
+          <a:ln/>
+        </p:spPr>
+        <p:txBody>
+          <a:bodyPr wrap="square" lIns="0" tIns="0" rIns="0" bIns="0" rtlCol="0" anchor="ctr">
+            <a:normAutofit/>
+          </a:bodyPr>
+          <a:lstStyle/>
+          <a:p>
+            <a:pPr algn="ctr" indent="0" marL="0">
+              <a:buNone/>
+            </a:pPr>
+            <a:r>
+              <a:rPr lang="en-US" sz="3600" b="1" dirty="0">
+                <a:solidFill>
+                  <a:srgbClr val="990011"/>
+                </a:solidFill>
+                <a:latin typeface="Times New Roman" pitchFamily="34" charset="0"/>
+                <a:ea typeface="Times New Roman" pitchFamily="34" charset="-122"/>
+                <a:cs typeface="Times New Roman" pitchFamily="34" charset="-120"/>
+              </a:rPr>
+              <a:t>2. Structure of the Atmosphere</a:t>
+            </a:r>
+            <a:endParaRPr lang="en-US" sz="3600" dirty="0"/>
+          </a:p>
+        </p:txBody>
+      </p:sp>
+      <p:sp>
+        <p:nvSpPr>
+          <p:cNvPr id="4" name="Text 2"/>
+          <p:cNvSpPr/>
+          <p:nvPr/>
+        </p:nvSpPr>
+        <p:spPr>
+          <a:xfrm>
+            <a:off x="365760" y="1783080"/>
+            <a:ext cx="4846320" cy="4617720"/>
+          </a:xfrm>
+          <a:prstGeom prst="rect">
+            <a:avLst/>
+          </a:prstGeom>
+          <a:noFill/>
+          <a:ln/>
+        </p:spPr>
+        <p:txBody>
+          <a:bodyPr wrap="square" lIns="0" tIns="0" rIns="0" bIns="0" rtlCol="0" anchor="t"/>
+          <a:lstStyle/>
+          <a:p>
+            <a:pPr algn="l" indent="0" marL="0">
+              <a:spcAft>
+                <a:spcPts val="800"/>
+              </a:spcAft>
+              <a:buNone/>
+            </a:pPr>
+            <a:r>
+              <a:rPr lang="en-US" sz="3600" b="1" dirty="0">
+                <a:solidFill>
+                  <a:srgbClr val="111111"/>
+                </a:solidFill>
+                <a:latin typeface="Times New Roman" pitchFamily="34" charset="0"/>
+                <a:ea typeface="Times New Roman" pitchFamily="34" charset="-122"/>
+                <a:cs typeface="Times New Roman" pitchFamily="34" charset="-120"/>
+              </a:rPr>
+              <a:t>Stratosphere: </a:t>
+            </a:r>
+            <a:pPr algn="l" indent="0" marL="0">
+              <a:spcAft>
+                <a:spcPts val="800"/>
+              </a:spcAft>
+              <a:buNone/>
+            </a:pPr>
+            <a:r>
+              <a:rPr lang="en-US" sz="3600" dirty="0">
+                <a:solidFill>
+                  <a:srgbClr val="111111"/>
+                </a:solidFill>
+                <a:latin typeface="Times New Roman" pitchFamily="34" charset="0"/>
+                <a:ea typeface="Times New Roman" pitchFamily="34" charset="-122"/>
+                <a:cs typeface="Times New Roman" pitchFamily="34" charset="-120"/>
+              </a:rPr>
+              <a:t>It lies between about 12 and 50 km and contains the ozone layer.</a:t>
+            </a:r>
+            <a:endParaRPr lang="en-US" sz="3600" dirty="0"/>
+          </a:p>
+        </p:txBody>
+      </p:sp>
       <p:pic>
         <p:nvPicPr>
-          <p:cNvPr id="3" name="Image 0" descr="/home/claude/f4/img/minesec_sheet.png">    </p:cNvPr>
+          <p:cNvPr id="5" name="Image 0" descr="/home/claude/f4/img/v2/f4_ozonehole.jpg">    </p:cNvPr>
           <p:cNvPicPr>
             <a:picLocks noChangeAspect="1"/>
           </p:cNvPicPr>
@@ -14294,8 +14588,8 @@
         </p:blipFill>
         <p:spPr>
           <a:xfrm>
-            <a:off x="0" y="658368"/>
-            <a:ext cx="2468880" cy="5833872"/>
+            <a:off x="5349240" y="2071212"/>
+            <a:ext cx="6659575" cy="3693983"/>
           </a:xfrm>
           <a:prstGeom prst="rect">
             <a:avLst/>
@@ -14304,14 +14598,14 @@
       </p:pic>
       <p:sp>
         <p:nvSpPr>
-          <p:cNvPr id="4" name="Text 1"/>
+          <p:cNvPr id="6" name="Text 3"/>
           <p:cNvSpPr/>
           <p:nvPr/>
         </p:nvSpPr>
         <p:spPr>
           <a:xfrm>
-            <a:off x="2697480" y="1005840"/>
-            <a:ext cx="9174175" cy="731520"/>
+            <a:off x="5349240" y="6089904"/>
+            <a:ext cx="6659575" cy="347472"/>
           </a:xfrm>
           <a:prstGeom prst="rect">
             <a:avLst/>
@@ -14320,142 +14614,24 @@
           <a:ln/>
         </p:spPr>
         <p:txBody>
-          <a:bodyPr wrap="square" lIns="0" tIns="0" rIns="0" bIns="0" rtlCol="0" anchor="ctr">
-            <a:normAutofit/>
-          </a:bodyPr>
+          <a:bodyPr wrap="square" lIns="0" tIns="0" rIns="0" bIns="0" rtlCol="0" anchor="ctr"/>
           <a:lstStyle/>
           <a:p>
             <a:pPr algn="ctr" indent="0" marL="0">
               <a:buNone/>
             </a:pPr>
             <a:r>
-              <a:rPr lang="en-US" sz="3600" b="1" dirty="0">
-                <a:solidFill>
-                  <a:srgbClr val="990011"/>
+              <a:rPr lang="en-US" sz="1600" i="1" dirty="0">
+                <a:solidFill>
+                  <a:srgbClr val="555555"/>
                 </a:solidFill>
                 <a:latin typeface="Times New Roman" pitchFamily="34" charset="0"/>
                 <a:ea typeface="Times New Roman" pitchFamily="34" charset="-122"/>
                 <a:cs typeface="Times New Roman" pitchFamily="34" charset="-120"/>
               </a:rPr>
-              <a:t>3. Structure of the Atmosphere</a:t>
-            </a:r>
-            <a:endParaRPr lang="en-US" sz="3600" dirty="0"/>
-          </a:p>
-        </p:txBody>
-      </p:sp>
-      <p:sp>
-        <p:nvSpPr>
-          <p:cNvPr id="5" name="Text 2"/>
-          <p:cNvSpPr/>
-          <p:nvPr/>
-        </p:nvSpPr>
-        <p:spPr>
-          <a:xfrm>
-            <a:off x="2697480" y="1783080"/>
-            <a:ext cx="9174175" cy="4663440"/>
-          </a:xfrm>
-          <a:prstGeom prst="rect">
-            <a:avLst/>
-          </a:prstGeom>
-          <a:noFill/>
-          <a:ln/>
-        </p:spPr>
-        <p:txBody>
-          <a:bodyPr wrap="square" lIns="0" tIns="0" rIns="0" bIns="0" rtlCol="0" anchor="t"/>
-          <a:lstStyle/>
-          <a:p>
-            <a:pPr algn="l" indent="0" marL="0">
-              <a:spcAft>
-                <a:spcPts val="800"/>
-              </a:spcAft>
-              <a:buNone/>
-            </a:pPr>
-            <a:r>
-              <a:rPr lang="en-US" sz="4000" i="1" dirty="0">
-                <a:solidFill>
-                  <a:srgbClr val="111111"/>
-                </a:solidFill>
-                <a:latin typeface="Times New Roman" pitchFamily="34" charset="0"/>
-                <a:ea typeface="Times New Roman" pitchFamily="34" charset="-122"/>
-                <a:cs typeface="Times New Roman" pitchFamily="34" charset="-120"/>
-              </a:rPr>
-              <a:t>The atmosphere has the following layers:</a:t>
-            </a:r>
-            <a:endParaRPr lang="en-US" sz="4000" dirty="0"/>
-          </a:p>
-          <a:p>
-            <a:pPr algn="l" indent="0" marL="0">
-              <a:spcAft>
-                <a:spcPts val="800"/>
-              </a:spcAft>
-              <a:buNone/>
-            </a:pPr>
-            <a:r>
-              <a:rPr lang="en-US" sz="4000" b="1" dirty="0">
-                <a:solidFill>
-                  <a:srgbClr val="111111"/>
-                </a:solidFill>
-                <a:latin typeface="Times New Roman" pitchFamily="34" charset="0"/>
-                <a:ea typeface="Times New Roman" pitchFamily="34" charset="-122"/>
-                <a:cs typeface="Times New Roman" pitchFamily="34" charset="-120"/>
-              </a:rPr>
-              <a:t>Troposphere: </a:t>
-            </a:r>
-            <a:pPr algn="l" indent="0" marL="0">
-              <a:spcAft>
-                <a:spcPts val="800"/>
-              </a:spcAft>
-              <a:buNone/>
-            </a:pPr>
-            <a:r>
-              <a:rPr lang="en-US" sz="4000" dirty="0">
-                <a:solidFill>
-                  <a:srgbClr val="111111"/>
-                </a:solidFill>
-                <a:latin typeface="Times New Roman" pitchFamily="34" charset="0"/>
-                <a:ea typeface="Times New Roman" pitchFamily="34" charset="-122"/>
-                <a:cs typeface="Times New Roman" pitchFamily="34" charset="-120"/>
-              </a:rPr>
-              <a:t>It is the lowest layer, up to about 12 km, where weather occurs.</a:t>
-            </a:r>
-            <a:endParaRPr lang="en-US" sz="4000" dirty="0"/>
-          </a:p>
-          <a:p>
-            <a:pPr algn="l" indent="0" marL="0">
-              <a:spcAft>
-                <a:spcPts val="800"/>
-              </a:spcAft>
-              <a:buNone/>
-            </a:pPr>
-            <a:r>
-              <a:rPr lang="en-US" sz="4000" b="1" dirty="0">
-                <a:solidFill>
-                  <a:srgbClr val="111111"/>
-                </a:solidFill>
-                <a:latin typeface="Times New Roman" pitchFamily="34" charset="0"/>
-                <a:ea typeface="Times New Roman" pitchFamily="34" charset="-122"/>
-                <a:cs typeface="Times New Roman" pitchFamily="34" charset="-120"/>
-              </a:rPr>
-              <a:t>Stratosphere: </a:t>
-            </a:r>
-            <a:pPr algn="l" indent="0" marL="0">
-              <a:spcAft>
-                <a:spcPts val="800"/>
-              </a:spcAft>
-              <a:buNone/>
-            </a:pPr>
-            <a:r>
-              <a:rPr lang="en-US" sz="4000" dirty="0">
-                <a:solidFill>
-                  <a:srgbClr val="111111"/>
-                </a:solidFill>
-                <a:latin typeface="Times New Roman" pitchFamily="34" charset="0"/>
-                <a:ea typeface="Times New Roman" pitchFamily="34" charset="-122"/>
-                <a:cs typeface="Times New Roman" pitchFamily="34" charset="-120"/>
-              </a:rPr>
-              <a:t>It lies between 12 and 50 km and contains the ozone layer.</a:t>
-            </a:r>
-            <a:endParaRPr lang="en-US" sz="4000" dirty="0"/>
+              <a:t>Illustration: the ozone layer seen from space</a:t>
+            </a:r>
+            <a:endParaRPr lang="en-US" sz="1600" dirty="0"/>
           </a:p>
         </p:txBody>
       </p:sp>
@@ -14630,7 +14806,7 @@
                 <a:ea typeface="Times New Roman" pitchFamily="34" charset="-122"/>
                 <a:cs typeface="Times New Roman" pitchFamily="34" charset="-120"/>
               </a:rPr>
-              <a:t>3. Structure of the Atmosphere (continued)</a:t>
+              <a:t>2. Structure of the Atmosphere</a:t>
             </a:r>
             <a:endParaRPr lang="en-US" sz="3600" dirty="0"/>
           </a:p>
@@ -14689,44 +14865,7 @@
                 <a:ea typeface="Times New Roman" pitchFamily="34" charset="-122"/>
                 <a:cs typeface="Times New Roman" pitchFamily="34" charset="-120"/>
               </a:rPr>
-              <a:t>It lies between 50 and 85 km and is very cold.</a:t>
-            </a:r>
-            <a:endParaRPr lang="en-US" sz="4000" dirty="0"/>
-          </a:p>
-          <a:p>
-            <a:pPr algn="l" indent="0" marL="0">
-              <a:spcAft>
-                <a:spcPts val="800"/>
-              </a:spcAft>
-              <a:buNone/>
-            </a:pPr>
-            <a:r>
-              <a:rPr lang="en-US" sz="4000" b="1" dirty="0">
-                <a:solidFill>
-                  <a:srgbClr val="111111"/>
-                </a:solidFill>
-                <a:latin typeface="Times New Roman" pitchFamily="34" charset="0"/>
-                <a:ea typeface="Times New Roman" pitchFamily="34" charset="-122"/>
-                <a:cs typeface="Times New Roman" pitchFamily="34" charset="-120"/>
-              </a:rPr>
-              <a:t>Thermosphere: </a:t>
-            </a:r>
-            <a:pPr algn="l" indent="0" marL="0">
-              <a:spcAft>
-                <a:spcPts val="800"/>
-              </a:spcAft>
-              <a:buNone/>
-            </a:pPr>
-            <a:r>
-              <a:rPr lang="en-US" sz="4000" dirty="0">
-                <a:solidFill>
-                  <a:srgbClr val="111111"/>
-                </a:solidFill>
-                <a:latin typeface="Times New Roman" pitchFamily="34" charset="0"/>
-                <a:ea typeface="Times New Roman" pitchFamily="34" charset="-122"/>
-                <a:cs typeface="Times New Roman" pitchFamily="34" charset="-120"/>
-              </a:rPr>
-              <a:t>It is the upper layer, above 85 km.</a:t>
+              <a:t>It lies between about 50 and 85 km and is very cold.</a:t>
             </a:r>
             <a:endParaRPr lang="en-US" sz="4000" dirty="0"/>
           </a:p>
@@ -15091,8 +15230,8 @@
         </p:nvSpPr>
         <p:spPr>
           <a:xfrm>
-            <a:off x="457200" y="1005840"/>
-            <a:ext cx="11277295" cy="731520"/>
+            <a:off x="365760" y="1005840"/>
+            <a:ext cx="11460175" cy="731520"/>
           </a:xfrm>
           <a:prstGeom prst="rect">
             <a:avLst/>
@@ -15101,7 +15240,9 @@
           <a:ln/>
         </p:spPr>
         <p:txBody>
-          <a:bodyPr wrap="square" lIns="0" tIns="0" rIns="0" bIns="0" rtlCol="0" anchor="ctr"/>
+          <a:bodyPr wrap="square" lIns="0" tIns="0" rIns="0" bIns="0" rtlCol="0" anchor="ctr">
+            <a:normAutofit/>
+          </a:bodyPr>
           <a:lstStyle/>
           <a:p>
             <a:pPr algn="ctr" indent="0" marL="0">
@@ -15116,7 +15257,66 @@
                 <a:ea typeface="Times New Roman" pitchFamily="34" charset="-122"/>
                 <a:cs typeface="Times New Roman" pitchFamily="34" charset="-120"/>
               </a:rPr>
-              <a:t>3. Structure of the Atmosphere</a:t>
+              <a:t>2. Structure of the Atmosphere</a:t>
+            </a:r>
+            <a:endParaRPr lang="en-US" sz="3600" dirty="0"/>
+          </a:p>
+        </p:txBody>
+      </p:sp>
+      <p:sp>
+        <p:nvSpPr>
+          <p:cNvPr id="4" name="Text 2"/>
+          <p:cNvSpPr/>
+          <p:nvPr/>
+        </p:nvSpPr>
+        <p:spPr>
+          <a:xfrm>
+            <a:off x="365760" y="1783080"/>
+            <a:ext cx="4846320" cy="4617720"/>
+          </a:xfrm>
+          <a:prstGeom prst="rect">
+            <a:avLst/>
+          </a:prstGeom>
+          <a:noFill/>
+          <a:ln/>
+        </p:spPr>
+        <p:txBody>
+          <a:bodyPr wrap="square" lIns="0" tIns="0" rIns="0" bIns="0" rtlCol="0" anchor="t"/>
+          <a:lstStyle/>
+          <a:p>
+            <a:pPr algn="l" indent="0" marL="0">
+              <a:spcAft>
+                <a:spcPts val="800"/>
+              </a:spcAft>
+              <a:buNone/>
+            </a:pPr>
+            <a:r>
+              <a:rPr lang="en-US" sz="3600" b="1" dirty="0">
+                <a:solidFill>
+                  <a:srgbClr val="111111"/>
+                </a:solidFill>
+                <a:latin typeface="Times New Roman" pitchFamily="34" charset="0"/>
+                <a:ea typeface="Times New Roman" pitchFamily="34" charset="-122"/>
+                <a:cs typeface="Times New Roman" pitchFamily="34" charset="-120"/>
+              </a:rPr>
+              <a:t>Thermosphere: </a:t>
+            </a:r>
+            <a:pPr algn="l" indent="0" marL="0">
+              <a:spcAft>
+                <a:spcPts val="800"/>
+              </a:spcAft>
+              <a:buNone/>
+            </a:pPr>
+            <a:r>
+              <a:rPr lang="en-US" sz="3600" dirty="0">
+                <a:solidFill>
+                  <a:srgbClr val="111111"/>
+                </a:solidFill>
+                <a:latin typeface="Times New Roman" pitchFamily="34" charset="0"/>
+                <a:ea typeface="Times New Roman" pitchFamily="34" charset="-122"/>
+                <a:cs typeface="Times New Roman" pitchFamily="34" charset="-120"/>
+              </a:rPr>
+              <a:t>It is the upper layer, above 85 km, where lights called auroras appear.</a:t>
             </a:r>
             <a:endParaRPr lang="en-US" sz="3600" dirty="0"/>
           </a:p>
@@ -15124,7 +15324,7 @@
       </p:sp>
       <p:pic>
         <p:nvPicPr>
-          <p:cNvPr id="4" name="Image 0" descr="/home/claude/f4/img/v2/atmosphere_big.png">    </p:cNvPr>
+          <p:cNvPr id="5" name="Image 0" descr="/home/claude/f4/img/v2/lsa_aurora.jpg">    </p:cNvPr>
           <p:cNvPicPr>
             <a:picLocks noChangeAspect="1"/>
           </p:cNvPicPr>
@@ -15138,8 +15338,8 @@
         </p:blipFill>
         <p:spPr>
           <a:xfrm>
-            <a:off x="629930" y="1783080"/>
-            <a:ext cx="10931835" cy="4270248"/>
+            <a:off x="5349240" y="2071212"/>
+            <a:ext cx="6659575" cy="3693983"/>
           </a:xfrm>
           <a:prstGeom prst="rect">
             <a:avLst/>
@@ -15148,14 +15348,14 @@
       </p:pic>
       <p:sp>
         <p:nvSpPr>
-          <p:cNvPr id="5" name="Text 2"/>
+          <p:cNvPr id="6" name="Text 3"/>
           <p:cNvSpPr/>
           <p:nvPr/>
         </p:nvSpPr>
         <p:spPr>
           <a:xfrm>
-            <a:off x="457200" y="6089904"/>
-            <a:ext cx="11277295" cy="347472"/>
+            <a:off x="5349240" y="6089904"/>
+            <a:ext cx="6659575" cy="347472"/>
           </a:xfrm>
           <a:prstGeom prst="rect">
             <a:avLst/>
@@ -15171,7 +15371,7 @@
               <a:buNone/>
             </a:pPr>
             <a:r>
-              <a:rPr lang="en-US" sz="1800" i="1" dirty="0">
+              <a:rPr lang="en-US" sz="1600" i="1" dirty="0">
                 <a:solidFill>
                   <a:srgbClr val="555555"/>
                 </a:solidFill>
@@ -15179,9 +15379,9 @@
                 <a:ea typeface="Times New Roman" pitchFamily="34" charset="-122"/>
                 <a:cs typeface="Times New Roman" pitchFamily="34" charset="-120"/>
               </a:rPr>
-              <a:t>Illustration: the layers of the atmosphere</a:t>
-            </a:r>
-            <a:endParaRPr lang="en-US" sz="1800" dirty="0"/>
+              <a:t>Illustration: an aurora</a:t>
+            </a:r>
+            <a:endParaRPr lang="en-US" sz="1600" dirty="0"/>
           </a:p>
         </p:txBody>
       </p:sp>
@@ -19166,7 +19366,7 @@
                           <a:ea typeface="Calibri" pitchFamily="34" charset="-122"/>
                           <a:cs typeface="Calibri" pitchFamily="34" charset="-120"/>
                         </a:rPr>
-                        <a:t>Meaning of the Atmosphere; Composition of the Atmosphere; Structure of the Atmosphere.</a:t>
+                        <a:t>DEFINITIONS; Composition of the Atmosphere; Structure of the Atmosphere.</a:t>
                       </a:r>
                       <a:endParaRPr lang="en-US" sz="1600" dirty="0">
                         <a:latin typeface="Calibri" charset="0"/>
@@ -19903,7 +20103,7 @@
         <p:spPr>
           <a:xfrm>
             <a:off x="0" y="658368"/>
-            <a:ext cx="2468880" cy="5833872"/>
+            <a:ext cx="3840480" cy="5833872"/>
           </a:xfrm>
           <a:prstGeom prst="rect">
             <a:avLst/>
@@ -19918,8 +20118,8 @@
         </p:nvSpPr>
         <p:spPr>
           <a:xfrm>
-            <a:off x="2697480" y="1005840"/>
-            <a:ext cx="9174175" cy="731520"/>
+            <a:off x="4069080" y="1005840"/>
+            <a:ext cx="7802575" cy="731520"/>
           </a:xfrm>
           <a:prstGeom prst="rect">
             <a:avLst/>
@@ -19959,8 +20159,8 @@
         </p:nvSpPr>
         <p:spPr>
           <a:xfrm>
-            <a:off x="2697480" y="1783080"/>
-            <a:ext cx="9174175" cy="4663440"/>
+            <a:off x="4069080" y="1783080"/>
+            <a:ext cx="7802575" cy="4663440"/>
           </a:xfrm>
           <a:prstGeom prst="rect">
             <a:avLst/>
@@ -20051,7 +20251,7 @@
                 <a:ea typeface="Calibri" pitchFamily="34" charset="-122"/>
                 <a:cs typeface="Calibri" pitchFamily="34" charset="-120"/>
               </a:rPr>
-              <a:t>Without the projector (Activity 3): draw four layers on the board.</a:t>
+              <a:t>Without the projector (Activity 3): breathe in and out.</a:t>
             </a:r>
             <a:endParaRPr lang="en-US" sz="2000" dirty="0"/>
           </a:p>
@@ -20228,7 +20428,7 @@
         <p:spPr>
           <a:xfrm>
             <a:off x="0" y="658368"/>
-            <a:ext cx="5120640" cy="5833872"/>
+            <a:ext cx="3840480" cy="5833872"/>
           </a:xfrm>
           <a:prstGeom prst="rect">
             <a:avLst/>
@@ -20243,8 +20443,8 @@
         </p:nvSpPr>
         <p:spPr>
           <a:xfrm>
-            <a:off x="5349240" y="1005840"/>
-            <a:ext cx="6522415" cy="731520"/>
+            <a:off x="4069080" y="1005840"/>
+            <a:ext cx="7802575" cy="731520"/>
           </a:xfrm>
           <a:prstGeom prst="rect">
             <a:avLst/>
@@ -20284,8 +20484,8 @@
         </p:nvSpPr>
         <p:spPr>
           <a:xfrm>
-            <a:off x="5349240" y="1783080"/>
-            <a:ext cx="6522415" cy="4663440"/>
+            <a:off x="4069080" y="1783080"/>
+            <a:ext cx="7802575" cy="4663440"/>
           </a:xfrm>
           <a:prstGeom prst="rect">
             <a:avLst/>
@@ -20377,6 +20577,27 @@
                 <a:cs typeface="Calibri" pitchFamily="34" charset="-120"/>
               </a:rPr>
               <a:t>Photo, Activity 5: “Sauron's Eye” by sjrankin, CC BY-NC 2.0, via Flickr (https://www.flickr.com/photos/24354425@N03/15252220086)</a:t>
+            </a:r>
+            <a:endParaRPr lang="en-US" sz="1800" dirty="0"/>
+          </a:p>
+          <a:p>
+            <a:pPr algn="l" marL="342900" indent="-342900">
+              <a:spcAft>
+                <a:spcPts val="800"/>
+              </a:spcAft>
+              <a:buSzPct val="100000"/>
+              <a:buChar char="•"/>
+            </a:pPr>
+            <a:r>
+              <a:rPr lang="en-US" sz="1800" dirty="0">
+                <a:solidFill>
+                  <a:srgbClr val="111111"/>
+                </a:solidFill>
+                <a:latin typeface="Calibri" pitchFamily="34" charset="0"/>
+                <a:ea typeface="Calibri" pitchFamily="34" charset="-122"/>
+                <a:cs typeface="Calibri" pitchFamily="34" charset="-120"/>
+              </a:rPr>
+              <a:t>Photo, board summary (Thermosphere): “Aurora Borealis” by Haukur H., CC BY-NC-ND 2.0, via Flickr (https://www.flickr.com/photos/34699962@N04/3256810738)</a:t>
             </a:r>
             <a:endParaRPr lang="en-US" sz="1800" dirty="0"/>
           </a:p>
@@ -21410,7 +21631,7 @@
         <p:spPr>
           <a:xfrm>
             <a:off x="0" y="658368"/>
-            <a:ext cx="3840480" cy="5833872"/>
+            <a:ext cx="2468880" cy="5833872"/>
           </a:xfrm>
           <a:prstGeom prst="rect">
             <a:avLst/>
@@ -21425,8 +21646,8 @@
         </p:nvSpPr>
         <p:spPr>
           <a:xfrm>
-            <a:off x="4069080" y="1005840"/>
-            <a:ext cx="7802575" cy="731520"/>
+            <a:off x="2697480" y="1005840"/>
+            <a:ext cx="9174175" cy="731520"/>
           </a:xfrm>
           <a:prstGeom prst="rect">
             <a:avLst/>
@@ -21466,8 +21687,8 @@
         </p:nvSpPr>
         <p:spPr>
           <a:xfrm>
-            <a:off x="4069080" y="1783080"/>
-            <a:ext cx="7802575" cy="4663440"/>
+            <a:off x="2697480" y="1783080"/>
+            <a:ext cx="9174175" cy="4663440"/>
           </a:xfrm>
           <a:prstGeom prst="rect">
             <a:avLst/>
@@ -21494,7 +21715,7 @@
                 <a:ea typeface="Times New Roman" pitchFamily="34" charset="-122"/>
                 <a:cs typeface="Times New Roman" pitchFamily="34" charset="-120"/>
               </a:rPr>
-              <a:t>During a flight from Garoua to Douala, Salif looks through the window. The plane is above the clouds and the sky is very clear. The pilot says the plane flies at 10 km in the lowest layer of the air.</a:t>
+              <a:t>During a flight from Garoua to Douala, Salif looks through the window. The plane is far above the clouds and the sky is very clear. Salif asks the flight attendant: "What is this air around the Earth made of, and are there layers in it?"</a:t>
             </a:r>
             <a:endParaRPr lang="en-US" sz="4000" dirty="0"/>
           </a:p>

--- a/lecons/F1/13_F1_M3_L07_The_Atmosphere.pptx
+++ b/lecons/F1/13_F1_M3_L07_The_Atmosphere.pptx
@@ -3457,7 +3457,7 @@
           <a:p>
             <a:r>
               <a:rPr lang="en-US" dirty="0"/>
-              <a:t>Before we start the new lesson, let us correct the homework I gave you at the end of Practical Work 5: Solid Waste Management. The question was: At home, sort the waste of one day into two groups and write what you found in each group. Take out your exercise books.</a:t>
+              <a:t>Before we start the new lesson, let us correct the homework I gave you at the end of Practical Work 5: Solid Waste Management. The question was: Name the two main gases of the atmosphere. Take out your exercise books.</a:t>
             </a:r>
             <a:endParaRPr lang="en-US" dirty="0"/>
           </a:p>
@@ -4073,7 +4073,7 @@
           <a:p>
             <a:r>
               <a:rPr lang="en-US" dirty="0"/>
-              <a:t>For your homework: Draw and label the four layers of the atmosphere. We shall correct it at the beginning of our next lesson.</a:t>
+              <a:t>For your homework: Name the two types of atmospheric pressure. We shall correct it at the beginning of our next lesson.</a:t>
             </a:r>
             <a:endParaRPr lang="en-US" dirty="0"/>
           </a:p>
@@ -4425,7 +4425,7 @@
           <a:p>
             <a:r>
               <a:rPr lang="en-US" dirty="0"/>
-              <a:t>Here is a good answer. Biodegradable: peelings of cassava and plantain, leftover food, leaves, paper. Non-biodegradable: plastic sachets and bottles, tins, broken glass. Compare it with your own answer and correct your work in red.</a:t>
+              <a:t>Here is a good answer. Nitrogen (about 78 %) and oxygen (about 21 %). Compare it with your own answer and correct your work in red.</a:t>
             </a:r>
             <a:endParaRPr lang="en-US" dirty="0"/>
           </a:p>
@@ -15104,7 +15104,7 @@
                 <a:ea typeface="Times New Roman" pitchFamily="34" charset="-122"/>
                 <a:cs typeface="Times New Roman" pitchFamily="34" charset="-120"/>
               </a:rPr>
-              <a:t>At home, sort the waste of one day into two groups and write what you found in each group.</a:t>
+              <a:t>Name the two main gases of the atmosphere.</a:t>
             </a:r>
             <a:endParaRPr lang="en-US" sz="4000" dirty="0"/>
           </a:p>
@@ -16759,7 +16759,7 @@
                 <a:ea typeface="Times New Roman" pitchFamily="34" charset="-122"/>
                 <a:cs typeface="Times New Roman" pitchFamily="34" charset="-120"/>
               </a:rPr>
-              <a:t>Draw and label the four layers of the atmosphere.</a:t>
+              <a:t>Name the two types of atmospheric pressure.</a:t>
             </a:r>
             <a:endParaRPr lang="en-US" sz="4000" dirty="0"/>
           </a:p>
@@ -19097,7 +19097,7 @@
                 <a:ea typeface="Times New Roman" pitchFamily="34" charset="-122"/>
                 <a:cs typeface="Times New Roman" pitchFamily="34" charset="-120"/>
               </a:rPr>
-              <a:t>Biodegradable: peelings of cassava and plantain, leftover food, leaves, paper. Non-biodegradable: plastic sachets and bottles, tins, broken glass.</a:t>
+              <a:t>Nitrogen (about 78 %) and oxygen (about 21 %).</a:t>
             </a:r>
             <a:endParaRPr lang="en-US" sz="4000" dirty="0"/>
           </a:p>
@@ -19642,7 +19642,7 @@
                           <a:ea typeface="Calibri" pitchFamily="34" charset="-122"/>
                           <a:cs typeface="Calibri" pitchFamily="34" charset="-120"/>
                         </a:rPr>
-                        <a:t>Draw and label the four layers of the atmosphere.</a:t>
+                        <a:t>Name the two types of atmospheric pressure.</a:t>
                       </a:r>
                       <a:endParaRPr lang="en-US" sz="1600" dirty="0">
                         <a:latin typeface="Calibri" charset="0"/>

--- a/lecons/F1/13_F1_M3_L07_The_Atmosphere.pptx
+++ b/lecons/F1/13_F1_M3_L07_The_Atmosphere.pptx
@@ -14299,7 +14299,7 @@
       </p:sp>
       <p:pic>
         <p:nvPicPr>
-          <p:cNvPr id="5" name="Image 0" descr="/home/claude/f4/img/v2/atmosphere_big.png">    </p:cNvPr>
+          <p:cNvPr id="5" name="Image 0" descr="/home/claude/f4/img/v2/atm_profile_gce.png">    </p:cNvPr>
           <p:cNvPicPr>
             <a:picLocks noChangeAspect="1"/>
           </p:cNvPicPr>
@@ -14313,8 +14313,8 @@
         </p:blipFill>
         <p:spPr>
           <a:xfrm>
-            <a:off x="5349240" y="2617506"/>
-            <a:ext cx="6659575" cy="2601397"/>
+            <a:off x="6358241" y="1783080"/>
+            <a:ext cx="4641574" cy="4270248"/>
           </a:xfrm>
           <a:prstGeom prst="rect">
             <a:avLst/>
